--- a/PitCrew_기획서.pptx
+++ b/PitCrew_기획서.pptx
@@ -17,6 +17,8 @@
     <p:sldId id="265" r:id="rId16"/>
     <p:sldId id="266" r:id="rId17"/>
     <p:sldId id="267" r:id="rId18"/>
+    <p:sldId id="268" r:id="rId19"/>
+    <p:sldId id="269" r:id="rId20"/>
   </p:sldIdLst>
   <p:sldSz cx="12191695" cy="6858000" type="screen4x3"/>
   <p:notesSz cx="6858000" cy="9144000"/>
@@ -3424,7 +3426,7 @@
                 </a:solidFill>
                 <a:latin typeface="Malgun Gothic"/>
               </a:rPr>
-              <a:t>MVP 4주 — 완성 가능 범위로 고정</a:t>
+              <a:t>Vertical Slice 데모 6주 (D-Day 2026-06-24) — 완성 가능 범위로 고정</a:t>
             </a:r>
           </a:p>
         </p:txBody>
@@ -3838,7 +3840,7 @@
                 </a:solidFill>
                 <a:latin typeface="Malgun Gothic"/>
               </a:rPr>
-              <a:t>MVP 콘텐츠 양</a:t>
+              <a:t>데모 콘텐츠 양</a:t>
             </a:r>
           </a:p>
         </p:txBody>
@@ -3873,7 +3875,7 @@
                 </a:solidFill>
                 <a:latin typeface="Malgun Gothic"/>
               </a:rPr>
-              <a:t>화물 5종 · 포장 4단계 · 배달지 3개 · 업그레이드 5장 · 결정 채널 9개 · 맵 1개 (OpenWorld_v2)</a:t>
+              <a:t>화물 5종 · 포장 4단계 · 배달지 8개 · 잡 11개 · 결정 채널 9 · 3 zone · F1 부품 6 골격 (데모 2 복원)</a:t>
             </a:r>
           </a:p>
         </p:txBody>
@@ -3943,7 +3945,7 @@
                 </a:solidFill>
                 <a:latin typeface="Malgun Gothic"/>
               </a:rPr>
-              <a:t>10 / 12</a:t>
+              <a:t>10 / 14</a:t>
             </a:r>
           </a:p>
         </p:txBody>
@@ -4505,7 +4507,7 @@
                 </a:solidFill>
                 <a:latin typeface="Malgun Gothic"/>
               </a:rPr>
-              <a:t>11 / 12</a:t>
+              <a:t>11 / 14</a:t>
             </a:r>
           </a:p>
         </p:txBody>
@@ -5710,7 +5712,7 @@
                 </a:solidFill>
                 <a:latin typeface="Malgun Gothic"/>
               </a:rPr>
-              <a:t>아키텍처 진척: 6 / 9 phase  ·  MVP 4주 스코프 안에서 진행 중</a:t>
+              <a:t>아키텍처 6/9 phase · 채널 1·3·4·5·6·8 데모 가능 · 채널 7 (F1 복원) W3 구현 예정 · D-39</a:t>
             </a:r>
           </a:p>
         </p:txBody>
@@ -5780,7 +5782,1006 @@
                 </a:solidFill>
                 <a:latin typeface="Malgun Gothic"/>
               </a:rPr>
-              <a:t>12 / 12</a:t>
+              <a:t>12 / 14</a:t>
+            </a:r>
+          </a:p>
+        </p:txBody>
+      </p:sp>
+    </p:spTree>
+  </p:cSld>
+  <p:clrMapOvr>
+    <a:masterClrMapping/>
+  </p:clrMapOvr>
+</p:sld>
+</file>
+
+<file path=ppt/slides/slide13.xml><?xml version="1.0" encoding="utf-8"?>
+<p:sld xmlns:a="http://schemas.openxmlformats.org/drawingml/2006/main" xmlns:p="http://schemas.openxmlformats.org/presentationml/2006/main" xmlns:r="http://schemas.openxmlformats.org/officeDocument/2006/relationships">
+  <p:cSld>
+    <p:spTree>
+      <p:nvGrpSpPr>
+        <p:cNvPr id="1" name=""/>
+        <p:cNvGrpSpPr/>
+        <p:nvPr/>
+      </p:nvGrpSpPr>
+      <p:grpSpPr/>
+      <p:sp>
+        <p:nvSpPr>
+          <p:cNvPr id="2" name="TextBox 1"/>
+          <p:cNvSpPr txBox="1"/>
+          <p:nvPr/>
+        </p:nvSpPr>
+        <p:spPr>
+          <a:xfrm>
+            <a:off x="457200" y="274320"/>
+            <a:ext cx="10972800" cy="640080"/>
+          </a:xfrm>
+          <a:prstGeom prst="rect">
+            <a:avLst/>
+          </a:prstGeom>
+          <a:noFill/>
+        </p:spPr>
+        <p:txBody>
+          <a:bodyPr wrap="none">
+            <a:spAutoFit/>
+          </a:bodyPr>
+          <a:lstStyle/>
+          <a:p>
+            <a:r>
+              <a:rPr sz="2800" b="1"/>
+              <a:t>결정 채널 9 × 구현 현황 (2026-05-16)</a:t>
+            </a:r>
+          </a:p>
+        </p:txBody>
+      </p:sp>
+      <p:graphicFrame>
+        <p:nvGraphicFramePr>
+          <p:cNvPr id="3" name="Table 2"/>
+          <p:cNvGraphicFramePr>
+            <a:graphicFrameLocks noGrp="1"/>
+          </p:cNvGraphicFramePr>
+          <p:nvPr/>
+        </p:nvGraphicFramePr>
+        <p:xfrm>
+          <a:off x="457200" y="1097280"/>
+          <a:ext cx="11247120" cy="5029200"/>
+        </p:xfrm>
+        <a:graphic>
+          <a:graphicData uri="http://schemas.openxmlformats.org/drawingml/2006/table">
+            <a:tbl>
+              <a:tblPr firstRow="1" bandRow="1">
+                <a:tableStyleId>{5C22544A-7EE6-4342-B048-85BDC9FD1C3A}</a:tableStyleId>
+              </a:tblPr>
+              <a:tblGrid>
+                <a:gridCol w="640080"/>
+                <a:gridCol w="2286000"/>
+                <a:gridCol w="5943600"/>
+                <a:gridCol w="2377440"/>
+              </a:tblGrid>
+              <a:tr h="502920">
+                <a:tc>
+                  <a:txBody>
+                    <a:bodyPr/>
+                    <a:lstStyle/>
+                    <a:p>
+                      <a:r>
+                        <a:rPr sz="1400" b="1"/>
+                        <a:t>#</a:t>
+                      </a:r>
+                    </a:p>
+                  </a:txBody>
+                  <a:tcPr/>
+                </a:tc>
+                <a:tc>
+                  <a:txBody>
+                    <a:bodyPr/>
+                    <a:lstStyle/>
+                    <a:p>
+                      <a:r>
+                        <a:rPr sz="1400" b="1"/>
+                        <a:t>채널</a:t>
+                      </a:r>
+                    </a:p>
+                  </a:txBody>
+                  <a:tcPr/>
+                </a:tc>
+                <a:tc>
+                  <a:txBody>
+                    <a:bodyPr/>
+                    <a:lstStyle/>
+                    <a:p>
+                      <a:r>
+                        <a:rPr sz="1400" b="1"/>
+                        <a:t>현재 상태</a:t>
+                      </a:r>
+                    </a:p>
+                  </a:txBody>
+                  <a:tcPr/>
+                </a:tc>
+                <a:tc>
+                  <a:txBody>
+                    <a:bodyPr/>
+                    <a:lstStyle/>
+                    <a:p>
+                      <a:r>
+                        <a:rPr sz="1400" b="1"/>
+                        <a:t>데모</a:t>
+                      </a:r>
+                    </a:p>
+                  </a:txBody>
+                  <a:tcPr/>
+                </a:tc>
+              </a:tr>
+              <a:tr h="502920">
+                <a:tc>
+                  <a:txBody>
+                    <a:bodyPr/>
+                    <a:lstStyle/>
+                    <a:p>
+                      <a:r>
+                        <a:rPr sz="1200"/>
+                        <a:t>1</a:t>
+                      </a:r>
+                    </a:p>
+                  </a:txBody>
+                  <a:tcPr/>
+                </a:tc>
+                <a:tc>
+                  <a:txBody>
+                    <a:bodyPr/>
+                    <a:lstStyle/>
+                    <a:p>
+                      <a:r>
+                        <a:rPr sz="1200"/>
+                        <a:t>속도</a:t>
+                      </a:r>
+                    </a:p>
+                  </a:txBody>
+                  <a:tcPr/>
+                </a:tc>
+                <a:tc>
+                  <a:txBody>
+                    <a:bodyPr/>
+                    <a:lstStyle/>
+                    <a:p>
+                      <a:r>
+                        <a:rPr sz="1200"/>
+                        <a:t>ArcadeCarController + 타이어 4종</a:t>
+                      </a:r>
+                    </a:p>
+                  </a:txBody>
+                  <a:tcPr/>
+                </a:tc>
+                <a:tc>
+                  <a:txBody>
+                    <a:bodyPr/>
+                    <a:lstStyle/>
+                    <a:p>
+                      <a:r>
+                        <a:rPr sz="1200"/>
+                        <a:t>⚠ 손상 튜닝</a:t>
+                      </a:r>
+                    </a:p>
+                  </a:txBody>
+                  <a:tcPr/>
+                </a:tc>
+              </a:tr>
+              <a:tr h="502920">
+                <a:tc>
+                  <a:txBody>
+                    <a:bodyPr/>
+                    <a:lstStyle/>
+                    <a:p>
+                      <a:r>
+                        <a:rPr sz="1200"/>
+                        <a:t>2</a:t>
+                      </a:r>
+                    </a:p>
+                  </a:txBody>
+                  <a:tcPr/>
+                </a:tc>
+                <a:tc>
+                  <a:txBody>
+                    <a:bodyPr/>
+                    <a:lstStyle/>
+                    <a:p>
+                      <a:r>
+                        <a:rPr sz="1200"/>
+                        <a:t>외형</a:t>
+                      </a:r>
+                    </a:p>
+                  </a:txBody>
+                  <a:tcPr/>
+                </a:tc>
+                <a:tc>
+                  <a:txBody>
+                    <a:bodyPr/>
+                    <a:lstStyle/>
+                    <a:p>
+                      <a:r>
+                        <a:rPr sz="1200"/>
+                        <a:t>미구현</a:t>
+                      </a:r>
+                    </a:p>
+                  </a:txBody>
+                  <a:tcPr/>
+                </a:tc>
+                <a:tc>
+                  <a:txBody>
+                    <a:bodyPr/>
+                    <a:lstStyle/>
+                    <a:p>
+                      <a:r>
+                        <a:rPr sz="1200"/>
+                        <a:t>❌ 포기</a:t>
+                      </a:r>
+                    </a:p>
+                  </a:txBody>
+                  <a:tcPr/>
+                </a:tc>
+              </a:tr>
+              <a:tr h="502920">
+                <a:tc>
+                  <a:txBody>
+                    <a:bodyPr/>
+                    <a:lstStyle/>
+                    <a:p>
+                      <a:r>
+                        <a:rPr sz="1200"/>
+                        <a:t>3</a:t>
+                      </a:r>
+                    </a:p>
+                  </a:txBody>
+                  <a:tcPr/>
+                </a:tc>
+                <a:tc>
+                  <a:txBody>
+                    <a:bodyPr/>
+                    <a:lstStyle/>
+                    <a:p>
+                      <a:r>
+                        <a:rPr sz="1200"/>
+                        <a:t>맵 접근도</a:t>
+                      </a:r>
+                    </a:p>
+                  </a:txBody>
+                  <a:tcPr/>
+                </a:tc>
+                <a:tc>
+                  <a:txBody>
+                    <a:bodyPr/>
+                    <a:lstStyle/>
+                    <a:p>
+                      <a:r>
+                        <a:rPr sz="1200"/>
+                        <a:t>Zone 3개 + autoUnlock + 다운타운 11잡</a:t>
+                      </a:r>
+                    </a:p>
+                  </a:txBody>
+                  <a:tcPr/>
+                </a:tc>
+                <a:tc>
+                  <a:txBody>
+                    <a:bodyPr/>
+                    <a:lstStyle/>
+                    <a:p>
+                      <a:r>
+                        <a:rPr sz="1200"/>
+                        <a:t>✅</a:t>
+                      </a:r>
+                    </a:p>
+                  </a:txBody>
+                  <a:tcPr/>
+                </a:tc>
+              </a:tr>
+              <a:tr h="502920">
+                <a:tc>
+                  <a:txBody>
+                    <a:bodyPr/>
+                    <a:lstStyle/>
+                    <a:p>
+                      <a:r>
+                        <a:rPr sz="1200"/>
+                        <a:t>4</a:t>
+                      </a:r>
+                    </a:p>
+                  </a:txBody>
+                  <a:tcPr/>
+                </a:tc>
+                <a:tc>
+                  <a:txBody>
+                    <a:bodyPr/>
+                    <a:lstStyle/>
+                    <a:p>
+                      <a:r>
+                        <a:rPr sz="1200"/>
+                        <a:t>배송물자</a:t>
+                      </a:r>
+                    </a:p>
+                  </a:txBody>
+                  <a:tcPr/>
+                </a:tc>
+                <a:tc>
+                  <a:txBody>
+                    <a:bodyPr/>
+                    <a:lstStyle/>
+                    <a:p>
+                      <a:r>
+                        <a:rPr sz="1200"/>
+                        <a:t>5종 (Eggs/Glass/Cake/Fish/Wine 등)</a:t>
+                      </a:r>
+                    </a:p>
+                  </a:txBody>
+                  <a:tcPr/>
+                </a:tc>
+                <a:tc>
+                  <a:txBody>
+                    <a:bodyPr/>
+                    <a:lstStyle/>
+                    <a:p>
+                      <a:r>
+                        <a:rPr sz="1200"/>
+                        <a:t>🟡 비주얼 빚</a:t>
+                      </a:r>
+                    </a:p>
+                  </a:txBody>
+                  <a:tcPr/>
+                </a:tc>
+              </a:tr>
+              <a:tr h="502920">
+                <a:tc>
+                  <a:txBody>
+                    <a:bodyPr/>
+                    <a:lstStyle/>
+                    <a:p>
+                      <a:r>
+                        <a:rPr sz="1200"/>
+                        <a:t>5</a:t>
+                      </a:r>
+                    </a:p>
+                  </a:txBody>
+                  <a:tcPr/>
+                </a:tc>
+                <a:tc>
+                  <a:txBody>
+                    <a:bodyPr/>
+                    <a:lstStyle/>
+                    <a:p>
+                      <a:r>
+                        <a:rPr sz="1200"/>
+                        <a:t>보관박스 크기</a:t>
+                      </a:r>
+                    </a:p>
+                  </a:txBody>
+                  <a:tcPr/>
+                </a:tc>
+                <a:tc>
+                  <a:txBody>
+                    <a:bodyPr/>
+                    <a:lstStyle/>
+                    <a:p>
+                      <a:r>
+                        <a:rPr sz="1200"/>
+                        <a:t>BoxCapacity 1~3, TrunkExpand, 다물건 트렁크</a:t>
+                      </a:r>
+                    </a:p>
+                  </a:txBody>
+                  <a:tcPr/>
+                </a:tc>
+                <a:tc>
+                  <a:txBody>
+                    <a:bodyPr/>
+                    <a:lstStyle/>
+                    <a:p>
+                      <a:r>
+                        <a:rPr sz="1200"/>
+                        <a:t>✅</a:t>
+                      </a:r>
+                    </a:p>
+                  </a:txBody>
+                  <a:tcPr/>
+                </a:tc>
+              </a:tr>
+              <a:tr h="502920">
+                <a:tc>
+                  <a:txBody>
+                    <a:bodyPr/>
+                    <a:lstStyle/>
+                    <a:p>
+                      <a:r>
+                        <a:rPr sz="1200"/>
+                        <a:t>6</a:t>
+                      </a:r>
+                    </a:p>
+                  </a:txBody>
+                  <a:tcPr/>
+                </a:tc>
+                <a:tc>
+                  <a:txBody>
+                    <a:bodyPr/>
+                    <a:lstStyle/>
+                    <a:p>
+                      <a:r>
+                        <a:rPr sz="1200"/>
+                        <a:t>포장</a:t>
+                      </a:r>
+                    </a:p>
+                  </a:txBody>
+                  <a:tcPr/>
+                </a:tc>
+                <a:tc>
+                  <a:txBody>
+                    <a:bodyPr/>
+                    <a:lstStyle/>
+                    <a:p>
+                      <a:r>
+                        <a:rPr sz="1200"/>
+                        <a:t>3D 포장 + 다물건 ◀▶ + 진행표시</a:t>
+                      </a:r>
+                    </a:p>
+                  </a:txBody>
+                  <a:tcPr/>
+                </a:tc>
+                <a:tc>
+                  <a:txBody>
+                    <a:bodyPr/>
+                    <a:lstStyle/>
+                    <a:p>
+                      <a:r>
+                        <a:rPr sz="1200"/>
+                        <a:t>✅</a:t>
+                      </a:r>
+                    </a:p>
+                  </a:txBody>
+                  <a:tcPr/>
+                </a:tc>
+              </a:tr>
+              <a:tr h="502920">
+                <a:tc>
+                  <a:txBody>
+                    <a:bodyPr/>
+                    <a:lstStyle/>
+                    <a:p>
+                      <a:r>
+                        <a:rPr sz="1200"/>
+                        <a:t>7</a:t>
+                      </a:r>
+                    </a:p>
+                  </a:txBody>
+                  <a:tcPr/>
+                </a:tc>
+                <a:tc>
+                  <a:txBody>
+                    <a:bodyPr/>
+                    <a:lstStyle/>
+                    <a:p>
+                      <a:r>
+                        <a:rPr sz="1200"/>
+                        <a:t>F1 부품 복원</a:t>
+                      </a:r>
+                    </a:p>
+                  </a:txBody>
+                  <a:tcPr/>
+                </a:tc>
+                <a:tc>
+                  <a:txBody>
+                    <a:bodyPr/>
+                    <a:lstStyle/>
+                    <a:p>
+                      <a:r>
+                        <a:rPr sz="1200"/>
+                        <a:t>UpgradeSystem만, 복원 트리 ❌</a:t>
+                      </a:r>
+                    </a:p>
+                  </a:txBody>
+                  <a:tcPr/>
+                </a:tc>
+                <a:tc>
+                  <a:txBody>
+                    <a:bodyPr/>
+                    <a:lstStyle/>
+                    <a:p>
+                      <a:r>
+                        <a:rPr sz="1200"/>
+                        <a:t>❌ W3</a:t>
+                      </a:r>
+                    </a:p>
+                  </a:txBody>
+                  <a:tcPr/>
+                </a:tc>
+              </a:tr>
+              <a:tr h="502920">
+                <a:tc>
+                  <a:txBody>
+                    <a:bodyPr/>
+                    <a:lstStyle/>
+                    <a:p>
+                      <a:r>
+                        <a:rPr sz="1200"/>
+                        <a:t>8</a:t>
+                      </a:r>
+                    </a:p>
+                  </a:txBody>
+                  <a:tcPr/>
+                </a:tc>
+                <a:tc>
+                  <a:txBody>
+                    <a:bodyPr/>
+                    <a:lstStyle/>
+                    <a:p>
+                      <a:r>
+                        <a:rPr sz="1200"/>
+                        <a:t>지도/내비</a:t>
+                      </a:r>
+                    </a:p>
+                  </a:txBody>
+                  <a:tcPr/>
+                </a:tc>
+                <a:tc>
+                  <a:txBody>
+                    <a:bodyPr/>
+                    <a:lstStyle/>
+                    <a:p>
+                      <a:r>
+                        <a:rPr sz="1200"/>
+                        <a:t>미니맵 + 화살표 + 경로계획</a:t>
+                      </a:r>
+                    </a:p>
+                  </a:txBody>
+                  <a:tcPr/>
+                </a:tc>
+                <a:tc>
+                  <a:txBody>
+                    <a:bodyPr/>
+                    <a:lstStyle/>
+                    <a:p>
+                      <a:r>
+                        <a:rPr sz="1200"/>
+                        <a:t>✅</a:t>
+                      </a:r>
+                    </a:p>
+                  </a:txBody>
+                  <a:tcPr/>
+                </a:tc>
+              </a:tr>
+              <a:tr h="502920">
+                <a:tc>
+                  <a:txBody>
+                    <a:bodyPr/>
+                    <a:lstStyle/>
+                    <a:p>
+                      <a:r>
+                        <a:rPr sz="1200"/>
+                        <a:t>9</a:t>
+                      </a:r>
+                    </a:p>
+                  </a:txBody>
+                  <a:tcPr/>
+                </a:tc>
+                <a:tc>
+                  <a:txBody>
+                    <a:bodyPr/>
+                    <a:lstStyle/>
+                    <a:p>
+                      <a:r>
+                        <a:rPr sz="1200"/>
+                        <a:t>연료 / 스테미나</a:t>
+                      </a:r>
+                    </a:p>
+                  </a:txBody>
+                  <a:tcPr/>
+                </a:tc>
+                <a:tc>
+                  <a:txBody>
+                    <a:bodyPr/>
+                    <a:lstStyle/>
+                    <a:p>
+                      <a:r>
+                        <a:rPr sz="1200"/>
+                        <a:t>FuelSystem 작동, 의미 약함</a:t>
+                      </a:r>
+                    </a:p>
+                  </a:txBody>
+                  <a:tcPr/>
+                </a:tc>
+                <a:tc>
+                  <a:txBody>
+                    <a:bodyPr/>
+                    <a:lstStyle/>
+                    <a:p>
+                      <a:r>
+                        <a:rPr sz="1200"/>
+                        <a:t>⚠</a:t>
+                      </a:r>
+                    </a:p>
+                  </a:txBody>
+                  <a:tcPr/>
+                </a:tc>
+              </a:tr>
+            </a:tbl>
+          </a:graphicData>
+        </a:graphic>
+      </p:graphicFrame>
+      <p:sp>
+        <p:nvSpPr>
+          <p:cNvPr id="4" name="TextBox 3"/>
+          <p:cNvSpPr txBox="1"/>
+          <p:nvPr/>
+        </p:nvSpPr>
+        <p:spPr>
+          <a:xfrm>
+            <a:off x="10972800" y="6400800"/>
+            <a:ext cx="1097280" cy="365760"/>
+          </a:xfrm>
+          <a:prstGeom prst="rect">
+            <a:avLst/>
+          </a:prstGeom>
+          <a:noFill/>
+        </p:spPr>
+        <p:txBody>
+          <a:bodyPr wrap="none">
+            <a:spAutoFit/>
+          </a:bodyPr>
+          <a:lstStyle/>
+          <a:p>
+            <a:r>
+              <a:rPr sz="1000"/>
+              <a:t>13 / 14</a:t>
+            </a:r>
+          </a:p>
+        </p:txBody>
+      </p:sp>
+    </p:spTree>
+  </p:cSld>
+  <p:clrMapOvr>
+    <a:masterClrMapping/>
+  </p:clrMapOvr>
+</p:sld>
+</file>
+
+<file path=ppt/slides/slide14.xml><?xml version="1.0" encoding="utf-8"?>
+<p:sld xmlns:a="http://schemas.openxmlformats.org/drawingml/2006/main" xmlns:p="http://schemas.openxmlformats.org/presentationml/2006/main" xmlns:r="http://schemas.openxmlformats.org/officeDocument/2006/relationships">
+  <p:cSld>
+    <p:spTree>
+      <p:nvGrpSpPr>
+        <p:cNvPr id="1" name=""/>
+        <p:cNvGrpSpPr/>
+        <p:nvPr/>
+      </p:nvGrpSpPr>
+      <p:grpSpPr/>
+      <p:sp>
+        <p:nvSpPr>
+          <p:cNvPr id="2" name="TextBox 1"/>
+          <p:cNvSpPr txBox="1"/>
+          <p:nvPr/>
+        </p:nvSpPr>
+        <p:spPr>
+          <a:xfrm>
+            <a:off x="457200" y="274320"/>
+            <a:ext cx="10972800" cy="640080"/>
+          </a:xfrm>
+          <a:prstGeom prst="rect">
+            <a:avLst/>
+          </a:prstGeom>
+          <a:noFill/>
+        </p:spPr>
+        <p:txBody>
+          <a:bodyPr wrap="none">
+            <a:spAutoFit/>
+          </a:bodyPr>
+          <a:lstStyle/>
+          <a:p>
+            <a:r>
+              <a:rPr sz="2800" b="1"/>
+              <a:t>잔여 일정 — 5.5주 (D-Day 2026-06-24)</a:t>
+            </a:r>
+          </a:p>
+        </p:txBody>
+      </p:sp>
+      <p:graphicFrame>
+        <p:nvGraphicFramePr>
+          <p:cNvPr id="3" name="Table 2"/>
+          <p:cNvGraphicFramePr>
+            <a:graphicFrameLocks noGrp="1"/>
+          </p:cNvGraphicFramePr>
+          <p:nvPr/>
+        </p:nvGraphicFramePr>
+        <p:xfrm>
+          <a:off x="457200" y="1097280"/>
+          <a:ext cx="11247120" cy="4572000"/>
+        </p:xfrm>
+        <a:graphic>
+          <a:graphicData uri="http://schemas.openxmlformats.org/drawingml/2006/table">
+            <a:tbl>
+              <a:tblPr firstRow="1" bandRow="1">
+                <a:tableStyleId>{5C22544A-7EE6-4342-B048-85BDC9FD1C3A}</a:tableStyleId>
+              </a:tblPr>
+              <a:tblGrid>
+                <a:gridCol w="2194560"/>
+                <a:gridCol w="5943600"/>
+                <a:gridCol w="3108960"/>
+              </a:tblGrid>
+              <a:tr h="762000">
+                <a:tc>
+                  <a:txBody>
+                    <a:bodyPr/>
+                    <a:lstStyle/>
+                    <a:p>
+                      <a:r>
+                        <a:rPr sz="1400" b="1"/>
+                        <a:t>주차</a:t>
+                      </a:r>
+                    </a:p>
+                  </a:txBody>
+                  <a:tcPr/>
+                </a:tc>
+                <a:tc>
+                  <a:txBody>
+                    <a:bodyPr/>
+                    <a:lstStyle/>
+                    <a:p>
+                      <a:r>
+                        <a:rPr sz="1400" b="1"/>
+                        <a:t>작업</a:t>
+                      </a:r>
+                    </a:p>
+                  </a:txBody>
+                  <a:tcPr/>
+                </a:tc>
+                <a:tc>
+                  <a:txBody>
+                    <a:bodyPr/>
+                    <a:lstStyle/>
+                    <a:p>
+                      <a:r>
+                        <a:rPr sz="1400" b="1"/>
+                        <a:t>산출물</a:t>
+                      </a:r>
+                    </a:p>
+                  </a:txBody>
+                  <a:tcPr/>
+                </a:tc>
+              </a:tr>
+              <a:tr h="762000">
+                <a:tc>
+                  <a:txBody>
+                    <a:bodyPr/>
+                    <a:lstStyle/>
+                    <a:p>
+                      <a:r>
+                        <a:rPr sz="1200"/>
+                        <a:t>W3 (5/16~5/26)</a:t>
+                      </a:r>
+                    </a:p>
+                    <a:p>
+                      <a:r>
+                        <a:rPr sz="1200"/>
+                        <a:t>+보너스</a:t>
+                      </a:r>
+                    </a:p>
+                  </a:txBody>
+                  <a:tcPr/>
+                </a:tc>
+                <a:tc>
+                  <a:txBody>
+                    <a:bodyPr/>
+                    <a:lstStyle/>
+                    <a:p>
+                      <a:r>
+                        <a:rPr sz="1200"/>
+                        <a:t>brainstorm + spec + plan → 차고/부품 시스템 구현 (USP)</a:t>
+                      </a:r>
+                    </a:p>
+                  </a:txBody>
+                  <a:tcPr/>
+                </a:tc>
+                <a:tc>
+                  <a:txBody>
+                    <a:bodyPr/>
+                    <a:lstStyle/>
+                    <a:p>
+                      <a:r>
+                        <a:rPr sz="1200"/>
+                        <a:t>차고 화면, 부품 6 카테고리 골격, 데모 2개 복원</a:t>
+                      </a:r>
+                    </a:p>
+                  </a:txBody>
+                  <a:tcPr/>
+                </a:tc>
+              </a:tr>
+              <a:tr h="762000">
+                <a:tc>
+                  <a:txBody>
+                    <a:bodyPr/>
+                    <a:lstStyle/>
+                    <a:p>
+                      <a:r>
+                        <a:rPr sz="1200"/>
+                        <a:t>W4 (5/27~6/2)</a:t>
+                      </a:r>
+                    </a:p>
+                  </a:txBody>
+                  <a:tcPr/>
+                </a:tc>
+                <a:tc>
+                  <a:txBody>
+                    <a:bodyPr/>
+                    <a:lstStyle/>
+                    <a:p>
+                      <a:r>
+                        <a:rPr sz="1200"/>
+                        <a:t>정산→차고 자동 연결 + 데모 시나리오 3런 + 페이싱 튜닝</a:t>
+                      </a:r>
+                    </a:p>
+                  </a:txBody>
+                  <a:tcPr/>
+                </a:tc>
+                <a:tc>
+                  <a:txBody>
+                    <a:bodyPr/>
+                    <a:lstStyle/>
+                    <a:p>
+                      <a:r>
+                        <a:rPr sz="1200"/>
+                        <a:t>3런 시리즈 (단순/다물건/손상위험), 손상·슬라이드·연료 수치</a:t>
+                      </a:r>
+                    </a:p>
+                  </a:txBody>
+                  <a:tcPr/>
+                </a:tc>
+              </a:tr>
+              <a:tr h="762000">
+                <a:tc>
+                  <a:txBody>
+                    <a:bodyPr/>
+                    <a:lstStyle/>
+                    <a:p>
+                      <a:r>
+                        <a:rPr sz="1200"/>
+                        <a:t>W5a (6/3~6/9)</a:t>
+                      </a:r>
+                    </a:p>
+                  </a:txBody>
+                  <a:tcPr/>
+                </a:tc>
+                <a:tc>
+                  <a:txBody>
+                    <a:bodyPr/>
+                    <a:lstStyle/>
+                    <a:p>
+                      <a:r>
+                        <a:rPr sz="1200"/>
+                        <a:t>손맛 패키지 + 화물 비주얼 차별화 + 인트로 1컷</a:t>
+                      </a:r>
+                    </a:p>
+                  </a:txBody>
+                  <a:tcPr/>
+                </a:tc>
+                <a:tc>
+                  <a:txBody>
+                    <a:bodyPr/>
+                    <a:lstStyle/>
+                    <a:p>
+                      <a:r>
+                        <a:rPr sz="1200"/>
+                        <a:t>사운드 5~8개, 보상 floating, 화물별 머티리얼, 첫 런 가이드</a:t>
+                      </a:r>
+                    </a:p>
+                  </a:txBody>
+                  <a:tcPr/>
+                </a:tc>
+              </a:tr>
+              <a:tr h="762000">
+                <a:tc>
+                  <a:txBody>
+                    <a:bodyPr/>
+                    <a:lstStyle/>
+                    <a:p>
+                      <a:r>
+                        <a:rPr sz="1200"/>
+                        <a:t>W5b (6/10~6/16)</a:t>
+                      </a:r>
+                    </a:p>
+                  </a:txBody>
+                  <a:tcPr/>
+                </a:tc>
+                <a:tc>
+                  <a:txBody>
+                    <a:bodyPr/>
+                    <a:lstStyle/>
+                    <a:p>
+                      <a:r>
+                        <a:rPr sz="1200"/>
+                        <a:t>HUD anim, 메뉴, 추가 폴리시, 해상도 호환</a:t>
+                      </a:r>
+                    </a:p>
+                  </a:txBody>
+                  <a:tcPr/>
+                </a:tc>
+                <a:tc>
+                  <a:txBody>
+                    <a:bodyPr/>
+                    <a:lstStyle/>
+                    <a:p>
+                      <a:r>
+                        <a:rPr sz="1200"/>
+                        <a:t>데모 영상에 잘 나오는 화면</a:t>
+                      </a:r>
+                    </a:p>
+                  </a:txBody>
+                  <a:tcPr/>
+                </a:tc>
+              </a:tr>
+              <a:tr h="762000">
+                <a:tc>
+                  <a:txBody>
+                    <a:bodyPr/>
+                    <a:lstStyle/>
+                    <a:p>
+                      <a:r>
+                        <a:rPr sz="1200"/>
+                        <a:t>W6 (6/17~6/24)</a:t>
+                      </a:r>
+                    </a:p>
+                  </a:txBody>
+                  <a:tcPr/>
+                </a:tc>
+                <a:tc>
+                  <a:txBody>
+                    <a:bodyPr/>
+                    <a:lstStyle/>
+                    <a:p>
+                      <a:r>
+                        <a:rPr sz="1200"/>
+                        <a:t>QA + Steam 페이지 자산</a:t>
+                      </a:r>
+                    </a:p>
+                  </a:txBody>
+                  <a:tcPr/>
+                </a:tc>
+                <a:tc>
+                  <a:txBody>
+                    <a:bodyPr/>
+                    <a:lstStyle/>
+                    <a:p>
+                      <a:r>
+                        <a:rPr sz="1200"/>
+                        <a:t>스크린샷 5장, GIF 3개, 트레일러 30초, 페이지</a:t>
+                      </a:r>
+                    </a:p>
+                  </a:txBody>
+                  <a:tcPr/>
+                </a:tc>
+              </a:tr>
+            </a:tbl>
+          </a:graphicData>
+        </a:graphic>
+      </p:graphicFrame>
+      <p:sp>
+        <p:nvSpPr>
+          <p:cNvPr id="4" name="TextBox 3"/>
+          <p:cNvSpPr txBox="1"/>
+          <p:nvPr/>
+        </p:nvSpPr>
+        <p:spPr>
+          <a:xfrm>
+            <a:off x="10972800" y="6400800"/>
+            <a:ext cx="1097280" cy="365760"/>
+          </a:xfrm>
+          <a:prstGeom prst="rect">
+            <a:avLst/>
+          </a:prstGeom>
+          <a:noFill/>
+        </p:spPr>
+        <p:txBody>
+          <a:bodyPr wrap="none">
+            <a:spAutoFit/>
+          </a:bodyPr>
+          <a:lstStyle/>
+          <a:p>
+            <a:r>
+              <a:rPr sz="1000"/>
+              <a:t>14 / 14</a:t>
             </a:r>
           </a:p>
         </p:txBody>
@@ -6130,7 +7131,7 @@
                 </a:solidFill>
                 <a:latin typeface="Malgun Gothic"/>
               </a:rPr>
-              <a:t>2 / 12</a:t>
+              <a:t>2 / 14</a:t>
             </a:r>
           </a:p>
         </p:txBody>
@@ -6363,7 +7364,7 @@
                 </a:solidFill>
                 <a:latin typeface="Malgun Gothic"/>
               </a:rPr>
-              <a:t>• OpenWorld_v2 씬</a:t>
+              <a:t>현재 빌드 (D-39, 2026-05-16)</a:t>
             </a:r>
           </a:p>
           <a:p>
@@ -6375,7 +7376,7 @@
                 </a:solidFill>
                 <a:latin typeface="Malgun Gothic"/>
               </a:rPr>
-              <a:t>• 106 도로 타일 + 8개 배달지</a:t>
+              <a:t>• OpenWorld_v2 — 도시 1, 8 배달지, 3 zone (다운타운/항구/공업)</a:t>
             </a:r>
           </a:p>
           <a:p>
@@ -6387,7 +7388,7 @@
                 </a:solidFill>
                 <a:latin typeface="Malgun Gothic"/>
               </a:rPr>
-              <a:t>• 차량 물리: 박스콜라이더 + 자체 컨트롤러</a:t>
+              <a:t>• 잡 풀 11개 — 다운타운 enrich 완료</a:t>
             </a:r>
           </a:p>
           <a:p>
@@ -6399,7 +7400,7 @@
                 </a:solidFill>
                 <a:latin typeface="Malgun Gothic"/>
               </a:rPr>
-              <a:t>• Service Locator 12/12 등록</a:t>
+              <a:t>• 다물건 트렁크 (1~3 큐브 슬라이드/충돌/손상)</a:t>
             </a:r>
           </a:p>
           <a:p>
@@ -6411,7 +7412,7 @@
                 </a:solidFill>
                 <a:latin typeface="Malgun Gothic"/>
               </a:rPr>
-              <a:t>• 화물: 박스 슬라이드 → trunk 박음 → 손상</a:t>
+              <a:t>• 3D 포장 (Bubble/Foam/Hardcase) + 다물건 ◀▶ 전환</a:t>
             </a:r>
           </a:p>
           <a:p>
@@ -6423,7 +7424,7 @@
                 </a:solidFill>
                 <a:latin typeface="Malgun Gothic"/>
               </a:rPr>
-              <a:t/>
+              <a:t>• 경로 계획 화면 + 미니맵 + 방향 화살표</a:t>
             </a:r>
           </a:p>
           <a:p>
@@ -6435,7 +7436,7 @@
                 </a:solidFill>
                 <a:latin typeface="Malgun Gothic"/>
               </a:rPr>
-              <a:t>⚠ 발표 시 30초 영상 권장</a:t>
+              <a:t>• 다물건 정산 (N건 합산 보상)</a:t>
             </a:r>
           </a:p>
         </p:txBody>
@@ -6505,7 +7506,7 @@
                 </a:solidFill>
                 <a:latin typeface="Malgun Gothic"/>
               </a:rPr>
-              <a:t>3 / 12</a:t>
+              <a:t>3 / 14</a:t>
             </a:r>
           </a:p>
         </p:txBody>
@@ -6920,7 +7921,7 @@
                 </a:solidFill>
                 <a:latin typeface="Malgun Gothic"/>
               </a:rPr>
-              <a:t>출발 세팅</a:t>
+              <a:t>트렁크 배치</a:t>
             </a:r>
           </a:p>
           <a:p>
@@ -7130,7 +8131,7 @@
                 </a:solidFill>
                 <a:latin typeface="Malgun Gothic"/>
               </a:rPr>
-              <a:t>업그레이드 / F1 복원</a:t>
+              <a:t>차고 / F1 부품 복원</a:t>
             </a:r>
           </a:p>
           <a:p>
@@ -7283,7 +8284,7 @@
                 </a:solidFill>
                 <a:latin typeface="Malgun Gothic"/>
               </a:rPr>
-              <a:t>4 / 12</a:t>
+              <a:t>4 / 14</a:t>
             </a:r>
           </a:p>
         </p:txBody>
@@ -7650,7 +8651,7 @@
                 </a:solidFill>
                 <a:latin typeface="Malgun Gothic"/>
               </a:rPr>
-              <a:t>5 / 12</a:t>
+              <a:t>5 / 14</a:t>
             </a:r>
           </a:p>
         </p:txBody>
@@ -8482,7 +9483,7 @@
                 </a:solidFill>
                 <a:latin typeface="Malgun Gothic"/>
               </a:rPr>
-              <a:t>6 / 12</a:t>
+              <a:t>6 / 14</a:t>
             </a:r>
           </a:p>
         </p:txBody>
@@ -9596,7 +10597,7 @@
                 </a:solidFill>
                 <a:latin typeface="Malgun Gothic"/>
               </a:rPr>
-              <a:t>7 / 12</a:t>
+              <a:t>7 / 14</a:t>
             </a:r>
           </a:p>
         </p:txBody>
@@ -10051,7 +11052,7 @@
                 </a:solidFill>
                 <a:latin typeface="Malgun Gothic"/>
               </a:rPr>
-              <a:t>8 / 12</a:t>
+              <a:t>8 / 14</a:t>
             </a:r>
           </a:p>
         </p:txBody>
@@ -11202,7 +12203,7 @@
                 </a:solidFill>
                 <a:latin typeface="Malgun Gothic"/>
               </a:rPr>
-              <a:t>9 / 12</a:t>
+              <a:t>9 / 14</a:t>
             </a:r>
           </a:p>
         </p:txBody>
